--- a/ppt.pptx
+++ b/ppt.pptx
@@ -3075,8 +3075,8 @@
           <a:lstStyle/>
           <a:p>
             <a:r>
-              <a:rPr lang="en-US" dirty="0" err="1" smtClean="0"/>
-              <a:t>Raftaar</a:t>
+              <a:rPr lang="en-US" smtClean="0"/>
+              <a:t>Badshah</a:t>
             </a:r>
             <a:endParaRPr lang="en-US" dirty="0"/>
           </a:p>

--- a/ppt.pptx
+++ b/ppt.pptx
@@ -3076,7 +3076,7 @@
           <a:p>
             <a:r>
               <a:rPr lang="en-US" smtClean="0"/>
-              <a:t>Badshah</a:t>
+              <a:t>Raftaar</a:t>
             </a:r>
             <a:endParaRPr lang="en-US" dirty="0"/>
           </a:p>
